--- a/Slides/06-Merge-Sort.pptx
+++ b/Slides/06-Merge-Sort.pptx
@@ -305,7 +305,7 @@
           <a:p>
             <a:fld id="{A061563A-35C7-49EE-9FEB-8EB53781E0B1}" type="datetimeFigureOut">
               <a:rPr lang="pt-BR" smtClean="0"/>
-              <a:t>07/02/2026</a:t>
+              <a:t>29/08/2026</a:t>
             </a:fld>
             <a:endParaRPr lang="pt-BR" dirty="0"/>
           </a:p>
@@ -473,7 +473,7 @@
           <a:p>
             <a:fld id="{A061563A-35C7-49EE-9FEB-8EB53781E0B1}" type="datetimeFigureOut">
               <a:rPr lang="pt-BR" smtClean="0"/>
-              <a:t>07/02/2026</a:t>
+              <a:t>29/08/2026</a:t>
             </a:fld>
             <a:endParaRPr lang="pt-BR" dirty="0"/>
           </a:p>
@@ -651,7 +651,7 @@
           <a:p>
             <a:fld id="{A061563A-35C7-49EE-9FEB-8EB53781E0B1}" type="datetimeFigureOut">
               <a:rPr lang="pt-BR" smtClean="0"/>
-              <a:t>07/02/2026</a:t>
+              <a:t>29/08/2026</a:t>
             </a:fld>
             <a:endParaRPr lang="pt-BR" dirty="0"/>
           </a:p>
@@ -819,7 +819,7 @@
           <a:p>
             <a:fld id="{A061563A-35C7-49EE-9FEB-8EB53781E0B1}" type="datetimeFigureOut">
               <a:rPr lang="pt-BR" smtClean="0"/>
-              <a:t>07/02/2026</a:t>
+              <a:t>29/08/2026</a:t>
             </a:fld>
             <a:endParaRPr lang="pt-BR" dirty="0"/>
           </a:p>
@@ -1064,7 +1064,7 @@
           <a:p>
             <a:fld id="{A061563A-35C7-49EE-9FEB-8EB53781E0B1}" type="datetimeFigureOut">
               <a:rPr lang="pt-BR" smtClean="0"/>
-              <a:t>07/02/2026</a:t>
+              <a:t>29/08/2026</a:t>
             </a:fld>
             <a:endParaRPr lang="pt-BR" dirty="0"/>
           </a:p>
@@ -1349,7 +1349,7 @@
           <a:p>
             <a:fld id="{A061563A-35C7-49EE-9FEB-8EB53781E0B1}" type="datetimeFigureOut">
               <a:rPr lang="pt-BR" smtClean="0"/>
-              <a:t>07/02/2026</a:t>
+              <a:t>29/08/2026</a:t>
             </a:fld>
             <a:endParaRPr lang="pt-BR" dirty="0"/>
           </a:p>
@@ -1768,7 +1768,7 @@
           <a:p>
             <a:fld id="{A061563A-35C7-49EE-9FEB-8EB53781E0B1}" type="datetimeFigureOut">
               <a:rPr lang="pt-BR" smtClean="0"/>
-              <a:t>07/02/2026</a:t>
+              <a:t>29/08/2026</a:t>
             </a:fld>
             <a:endParaRPr lang="pt-BR" dirty="0"/>
           </a:p>
@@ -1885,7 +1885,7 @@
           <a:p>
             <a:fld id="{A061563A-35C7-49EE-9FEB-8EB53781E0B1}" type="datetimeFigureOut">
               <a:rPr lang="pt-BR" smtClean="0"/>
-              <a:t>07/02/2026</a:t>
+              <a:t>29/08/2026</a:t>
             </a:fld>
             <a:endParaRPr lang="pt-BR" dirty="0"/>
           </a:p>
@@ -1980,7 +1980,7 @@
           <a:p>
             <a:fld id="{A061563A-35C7-49EE-9FEB-8EB53781E0B1}" type="datetimeFigureOut">
               <a:rPr lang="pt-BR" smtClean="0"/>
-              <a:t>07/02/2026</a:t>
+              <a:t>29/08/2026</a:t>
             </a:fld>
             <a:endParaRPr lang="pt-BR" dirty="0"/>
           </a:p>
@@ -2255,7 +2255,7 @@
           <a:p>
             <a:fld id="{A061563A-35C7-49EE-9FEB-8EB53781E0B1}" type="datetimeFigureOut">
               <a:rPr lang="pt-BR" smtClean="0"/>
-              <a:t>07/02/2026</a:t>
+              <a:t>29/08/2026</a:t>
             </a:fld>
             <a:endParaRPr lang="pt-BR" dirty="0"/>
           </a:p>
@@ -2507,7 +2507,7 @@
           <a:p>
             <a:fld id="{A061563A-35C7-49EE-9FEB-8EB53781E0B1}" type="datetimeFigureOut">
               <a:rPr lang="pt-BR" smtClean="0"/>
-              <a:t>07/02/2026</a:t>
+              <a:t>29/08/2026</a:t>
             </a:fld>
             <a:endParaRPr lang="pt-BR" dirty="0"/>
           </a:p>
@@ -2721,7 +2721,7 @@
           <a:p>
             <a:fld id="{A061563A-35C7-49EE-9FEB-8EB53781E0B1}" type="datetimeFigureOut">
               <a:rPr lang="pt-BR" smtClean="0"/>
-              <a:t>07/02/2026</a:t>
+              <a:t>29/08/2026</a:t>
             </a:fld>
             <a:endParaRPr lang="pt-BR" dirty="0"/>
           </a:p>
@@ -3450,15 +3450,15 @@
                   <a:srgbClr val="00B050"/>
                 </a:solidFill>
               </a:rPr>
-              <a:t>251</a:t>
-            </a:r>
-            <a:r>
-              <a:rPr lang="pt-BR" sz="2000" dirty="0">
+              <a:t>09</a:t>
+            </a:r>
+            <a:r>
+              <a:rPr lang="pt-BR" sz="2000">
                 <a:solidFill>
                   <a:srgbClr val="7030A0"/>
                 </a:solidFill>
               </a:rPr>
-              <a:t>@fatec.</a:t>
+              <a:t>@cps.</a:t>
             </a:r>
             <a:r>
               <a:rPr lang="pt-BR" sz="2000" dirty="0">
